--- a/Presentacion_EmojiLang.pptx
+++ b/Presentacion_EmojiLang.pptx
@@ -3678,7 +3678,7 @@
         <p:spPr>
           <a:xfrm>
             <a:off x="777240" y="1353312"/>
-            <a:ext cx="8046720" cy="1051560"/>
+            <a:ext cx="8046720" cy="837152"/>
           </a:xfrm>
           <a:prstGeom prst="rect">
             <a:avLst/>
@@ -3699,7 +3699,7 @@
                 </a:solidFill>
                 <a:latin typeface="Aptos"/>
               </a:rPr>
-              <a:t>EmojiLang</a:t>
+              <a:t>GreenByte</a:t>
             </a:r>
             <a:endParaRPr lang="es-ES" sz="5200" b="1" noProof="0" dirty="0">
               <a:solidFill>
@@ -4224,20 +4224,19 @@
         <p:spPr>
           <a:xfrm>
             <a:off x="4160520" y="1828800"/>
-            <a:ext cx="6217920" cy="274320"/>
-          </a:xfrm>
-          <a:prstGeom prst="rect">
-            <a:avLst/>
-          </a:prstGeom>
-          <a:noFill/>
-        </p:spPr>
-        <p:txBody>
-          <a:bodyPr wrap="square" lIns="36576" tIns="18288" rIns="36576" bIns="18288" anchor="t">
-            <a:spAutoFit/>
-          </a:bodyPr>
-          <a:lstStyle/>
-          <a:p>
-            <a:pPr algn="l"/>
+            <a:ext cx="6217920" cy="267766"/>
+          </a:xfrm>
+          <a:prstGeom prst="rect">
+            <a:avLst/>
+          </a:prstGeom>
+          <a:noFill/>
+        </p:spPr>
+        <p:txBody>
+          <a:bodyPr wrap="square" lIns="36576" tIns="18288" rIns="36576" bIns="18288" anchor="t">
+            <a:spAutoFit/>
+          </a:bodyPr>
+          <a:lstStyle/>
+          <a:p>
             <a:r>
               <a:rPr lang="es-ES" sz="1500" b="0" noProof="0" dirty="0">
                 <a:solidFill>
@@ -4248,13 +4247,13 @@
               <a:t>Qué es </a:t>
             </a:r>
             <a:r>
-              <a:rPr lang="es-ES" sz="1500" b="0" noProof="0" dirty="0" err="1">
+              <a:rPr lang="es-ES" sz="1500" dirty="0" err="1">
                 <a:solidFill>
                   <a:srgbClr val="687485"/>
                 </a:solidFill>
                 <a:latin typeface="Aptos"/>
               </a:rPr>
-              <a:t>EmojiLang</a:t>
+              <a:t>greenbyte</a:t>
             </a:r>
             <a:r>
               <a:rPr lang="es-ES" sz="1500" b="0" noProof="0" dirty="0">
@@ -5027,20 +5026,19 @@
         <p:spPr>
           <a:xfrm>
             <a:off x="566928" y="713232"/>
-            <a:ext cx="9875520" cy="640080"/>
-          </a:xfrm>
-          <a:prstGeom prst="rect">
-            <a:avLst/>
-          </a:prstGeom>
-          <a:noFill/>
-        </p:spPr>
-        <p:txBody>
-          <a:bodyPr wrap="square" lIns="36576" tIns="18288" rIns="36576" bIns="18288" anchor="t">
-            <a:spAutoFit/>
-          </a:bodyPr>
-          <a:lstStyle/>
-          <a:p>
-            <a:pPr algn="l"/>
+            <a:ext cx="9875520" cy="529376"/>
+          </a:xfrm>
+          <a:prstGeom prst="rect">
+            <a:avLst/>
+          </a:prstGeom>
+          <a:noFill/>
+        </p:spPr>
+        <p:txBody>
+          <a:bodyPr wrap="square" lIns="36576" tIns="18288" rIns="36576" bIns="18288" anchor="t">
+            <a:spAutoFit/>
+          </a:bodyPr>
+          <a:lstStyle/>
+          <a:p>
             <a:r>
               <a:rPr lang="es-ES" sz="2900" b="1" noProof="0" dirty="0">
                 <a:solidFill>
@@ -5051,18 +5049,21 @@
               <a:t>El diccionario de </a:t>
             </a:r>
             <a:r>
-              <a:rPr lang="es-ES" sz="2900" b="1" noProof="0" dirty="0" err="1">
+              <a:rPr lang="es-ES" sz="3200" b="1" noProof="0" dirty="0">
                 <a:solidFill>
                   <a:srgbClr val="121B2B"/>
                 </a:solidFill>
                 <a:latin typeface="Aptos"/>
               </a:rPr>
-              <a:t>EmojiLang</a:t>
+              <a:t>g</a:t>
+            </a:r>
+            <a:r>
+              <a:rPr lang="es-ES" sz="3200" b="1" dirty="0" err="1">
+                <a:latin typeface="Aptos"/>
+              </a:rPr>
+              <a:t>reenbyte</a:t>
             </a:r>
             <a:endParaRPr lang="es-ES" sz="2900" b="1" noProof="0" dirty="0">
-              <a:solidFill>
-                <a:srgbClr val="121B2B"/>
-              </a:solidFill>
               <a:latin typeface="Aptos"/>
             </a:endParaRPr>
           </a:p>
@@ -6073,20 +6074,19 @@
         <p:spPr>
           <a:xfrm>
             <a:off x="621792" y="2011680"/>
-            <a:ext cx="5669280" cy="502920"/>
-          </a:xfrm>
-          <a:prstGeom prst="rect">
-            <a:avLst/>
-          </a:prstGeom>
-          <a:noFill/>
-        </p:spPr>
-        <p:txBody>
-          <a:bodyPr wrap="square" lIns="36576" tIns="18288" rIns="36576" bIns="18288" anchor="t">
-            <a:spAutoFit/>
-          </a:bodyPr>
-          <a:lstStyle/>
-          <a:p>
-            <a:pPr algn="l"/>
+            <a:ext cx="5669280" cy="744819"/>
+          </a:xfrm>
+          <a:prstGeom prst="rect">
+            <a:avLst/>
+          </a:prstGeom>
+          <a:noFill/>
+        </p:spPr>
+        <p:txBody>
+          <a:bodyPr wrap="square" lIns="36576" tIns="18288" rIns="36576" bIns="18288" anchor="t">
+            <a:spAutoFit/>
+          </a:bodyPr>
+          <a:lstStyle/>
+          <a:p>
             <a:r>
               <a:rPr lang="es-ES" sz="2200" b="1" noProof="0" dirty="0">
                 <a:solidFill>
@@ -6097,13 +6097,13 @@
               <a:t>Un pequeño motor que ejecuta programas </a:t>
             </a:r>
             <a:r>
-              <a:rPr lang="es-ES" sz="2200" b="1" noProof="0" dirty="0" err="1">
+              <a:rPr lang="es-ES" sz="2400" b="1" dirty="0">
                 <a:solidFill>
                   <a:srgbClr val="121B2B"/>
                 </a:solidFill>
                 <a:latin typeface="Aptos"/>
               </a:rPr>
-              <a:t>EmojiLang</a:t>
+              <a:t>usando emojis</a:t>
             </a:r>
             <a:r>
               <a:rPr lang="es-ES" sz="2200" b="1" noProof="0" dirty="0">
@@ -9201,20 +9201,19 @@
         <p:spPr>
           <a:xfrm>
             <a:off x="713232" y="1024128"/>
-            <a:ext cx="7772400" cy="640080"/>
-          </a:xfrm>
-          <a:prstGeom prst="rect">
-            <a:avLst/>
-          </a:prstGeom>
-          <a:noFill/>
-        </p:spPr>
-        <p:txBody>
-          <a:bodyPr wrap="square" lIns="36576" tIns="18288" rIns="36576" bIns="18288" anchor="t">
-            <a:spAutoFit/>
-          </a:bodyPr>
-          <a:lstStyle/>
-          <a:p>
-            <a:pPr algn="l"/>
+            <a:ext cx="7772400" cy="621709"/>
+          </a:xfrm>
+          <a:prstGeom prst="rect">
+            <a:avLst/>
+          </a:prstGeom>
+          <a:noFill/>
+        </p:spPr>
+        <p:txBody>
+          <a:bodyPr wrap="square" lIns="36576" tIns="18288" rIns="36576" bIns="18288" anchor="t">
+            <a:spAutoFit/>
+          </a:bodyPr>
+          <a:lstStyle/>
+          <a:p>
             <a:r>
               <a:rPr lang="es-ES" sz="3800" b="1" noProof="0" dirty="0">
                 <a:solidFill>
@@ -9225,13 +9224,13 @@
               <a:t>¿Por qué </a:t>
             </a:r>
             <a:r>
-              <a:rPr lang="es-ES" sz="3800" b="1" noProof="0" dirty="0" err="1">
+              <a:rPr lang="es-ES" sz="3800" b="1" dirty="0" err="1">
                 <a:solidFill>
                   <a:srgbClr val="FFFFFF"/>
                 </a:solidFill>
                 <a:latin typeface="Aptos"/>
               </a:rPr>
-              <a:t>EmojiLang</a:t>
+              <a:t>greenbyte</a:t>
             </a:r>
             <a:r>
               <a:rPr lang="es-ES" sz="3800" b="1" noProof="0" dirty="0">
@@ -9803,14 +9802,20 @@
           <a:p>
             <a:pPr algn="r"/>
             <a:r>
-              <a:rPr lang="es-ES" sz="1800" b="1" noProof="0" dirty="0">
+              <a:rPr lang="es-ES" b="1" dirty="0">
                 <a:solidFill>
                   <a:srgbClr val="7CE92B"/>
                 </a:solidFill>
                 <a:latin typeface="Aptos"/>
               </a:rPr>
-              <a:t>EMOJILANG</a:t>
-            </a:r>
+              <a:t>GREENBYTE</a:t>
+            </a:r>
+            <a:endParaRPr lang="es-ES" sz="1800" b="1" noProof="0" dirty="0">
+              <a:solidFill>
+                <a:srgbClr val="7CE92B"/>
+              </a:solidFill>
+              <a:latin typeface="Aptos"/>
+            </a:endParaRPr>
           </a:p>
         </p:txBody>
       </p:sp>
